--- a/examples/repositories/cyberppt/pages/slide-05.pptx
+++ b/examples/repositories/cyberppt/pages/slide-05.pptx
@@ -910,8 +910,8 @@
         </p:nvSpPr>
         <p:spPr>
           <a:xfrm>
-            <a:off x="466668" y="451855"/>
-            <a:ext cx="597918" cy="481007"/>
+            <a:off x="466668" y="422704"/>
+            <a:ext cx="597918" cy="539311"/>
           </a:xfrm>
           <a:prstGeom prst="rect">
             <a:avLst/>
@@ -949,7 +949,7 @@
         </p:nvSpPr>
         <p:spPr>
           <a:xfrm>
-            <a:off x="1414587" y="364400"/>
+            <a:off x="1421878" y="342536"/>
             <a:ext cx="10390649" cy="685071"/>
           </a:xfrm>
           <a:prstGeom prst="rect">
@@ -988,7 +988,7 @@
         </p:nvSpPr>
         <p:spPr>
           <a:xfrm>
-            <a:off x="1436462" y="1144215"/>
+            <a:off x="1458337" y="1107775"/>
             <a:ext cx="10354191" cy="386264"/>
           </a:xfrm>
           <a:prstGeom prst="rect">
@@ -1378,7 +1378,7 @@
         </p:nvSpPr>
         <p:spPr>
           <a:xfrm>
-            <a:off x="663543" y="2514357"/>
+            <a:off x="670835" y="2499781"/>
             <a:ext cx="2872923" cy="604903"/>
           </a:xfrm>
           <a:prstGeom prst="rect">
@@ -1417,7 +1417,7 @@
         </p:nvSpPr>
         <p:spPr>
           <a:xfrm>
-            <a:off x="3973968" y="2514357"/>
+            <a:off x="3966676" y="2521645"/>
             <a:ext cx="3704175" cy="604903"/>
           </a:xfrm>
           <a:prstGeom prst="rect">
@@ -1434,7 +1434,7 @@
               <a:buNone/>
             </a:pPr>
             <a:r>
-              <a:rPr lang="en-US" sz="2000" dirty="0">
+              <a:rPr lang="en-US" sz="2000" b="1" dirty="0">
                 <a:solidFill>
                   <a:srgbClr val="161616"/>
                 </a:solidFill>
@@ -1442,7 +1442,7 @@
                 <a:ea typeface="Yu Gothic" pitchFamily="34" charset="-122"/>
                 <a:cs typeface="Yu Gothic" pitchFamily="34" charset="-120"/>
               </a:rPr>
-              <a:t>来訪者に目的の案内を探して</a:t>
+              <a:t>来訪者に目的の案内を</a:t>
             </a:r>
             <a:endParaRPr lang="en-US" sz="2000" dirty="0"/>
           </a:p>
@@ -1451,7 +1451,7 @@
               <a:buNone/>
             </a:pPr>
             <a:r>
-              <a:rPr lang="en-US" sz="2000" dirty="0">
+              <a:rPr lang="en-US" sz="2000" b="1" dirty="0">
                 <a:solidFill>
                   <a:srgbClr val="161616"/>
                 </a:solidFill>
@@ -1459,7 +1459,7 @@
                 <a:ea typeface="Yu Gothic" pitchFamily="34" charset="-122"/>
                 <a:cs typeface="Yu Gothic" pitchFamily="34" charset="-120"/>
               </a:rPr>
-              <a:t>もらう</a:t>
+              <a:t>探してもらう</a:t>
             </a:r>
             <a:endParaRPr lang="en-US" sz="2000" dirty="0"/>
           </a:p>
@@ -1473,7 +1473,7 @@
         </p:nvSpPr>
         <p:spPr>
           <a:xfrm>
-            <a:off x="8115644" y="2514357"/>
+            <a:off x="8101061" y="2528933"/>
             <a:ext cx="3551050" cy="604903"/>
           </a:xfrm>
           <a:prstGeom prst="rect">
@@ -1490,7 +1490,7 @@
               <a:buNone/>
             </a:pPr>
             <a:r>
-              <a:rPr lang="en-US" sz="2000" dirty="0">
+              <a:rPr lang="en-US" sz="2000" b="1" dirty="0">
                 <a:solidFill>
                   <a:srgbClr val="161616"/>
                 </a:solidFill>
@@ -1512,7 +1512,7 @@
         </p:nvSpPr>
         <p:spPr>
           <a:xfrm>
-            <a:off x="663543" y="3410780"/>
+            <a:off x="670835" y="3410780"/>
             <a:ext cx="2872923" cy="466431"/>
           </a:xfrm>
           <a:prstGeom prst="rect">
@@ -1551,7 +1551,7 @@
         </p:nvSpPr>
         <p:spPr>
           <a:xfrm>
-            <a:off x="3973968" y="3410780"/>
+            <a:off x="3966676" y="3432644"/>
             <a:ext cx="3704175" cy="466431"/>
           </a:xfrm>
           <a:prstGeom prst="rect">
@@ -1568,7 +1568,7 @@
               <a:buNone/>
             </a:pPr>
             <a:r>
-              <a:rPr lang="en-US" sz="2000" dirty="0">
+              <a:rPr lang="en-US" sz="2000" b="1" dirty="0">
                 <a:solidFill>
                   <a:srgbClr val="161616"/>
                 </a:solidFill>
@@ -1590,7 +1590,7 @@
         </p:nvSpPr>
         <p:spPr>
           <a:xfrm>
-            <a:off x="8115644" y="3410780"/>
+            <a:off x="8101061" y="3432644"/>
             <a:ext cx="3551050" cy="466431"/>
           </a:xfrm>
           <a:prstGeom prst="rect">
@@ -1607,7 +1607,7 @@
               <a:buNone/>
             </a:pPr>
             <a:r>
-              <a:rPr lang="en-US" sz="2000" dirty="0">
+              <a:rPr lang="en-US" sz="2000" b="1" dirty="0">
                 <a:solidFill>
                   <a:srgbClr val="161616"/>
                 </a:solidFill>
@@ -1629,7 +1629,7 @@
         </p:nvSpPr>
         <p:spPr>
           <a:xfrm>
-            <a:off x="663543" y="4168731"/>
+            <a:off x="670835" y="4161443"/>
             <a:ext cx="2872923" cy="466431"/>
           </a:xfrm>
           <a:prstGeom prst="rect">
@@ -1668,7 +1668,7 @@
         </p:nvSpPr>
         <p:spPr>
           <a:xfrm>
-            <a:off x="3973968" y="4168731"/>
+            <a:off x="3973968" y="4190595"/>
             <a:ext cx="3704175" cy="466431"/>
           </a:xfrm>
           <a:prstGeom prst="rect">
@@ -1685,7 +1685,7 @@
               <a:buNone/>
             </a:pPr>
             <a:r>
-              <a:rPr lang="en-US" sz="2000" dirty="0">
+              <a:rPr lang="en-US" sz="2000" b="1" dirty="0">
                 <a:solidFill>
                   <a:srgbClr val="161616"/>
                 </a:solidFill>
@@ -1707,8 +1707,8 @@
         </p:nvSpPr>
         <p:spPr>
           <a:xfrm>
-            <a:off x="8115644" y="4168731"/>
-            <a:ext cx="3551050" cy="466431"/>
+            <a:off x="7969810" y="4168731"/>
+            <a:ext cx="3806259" cy="466431"/>
           </a:xfrm>
           <a:prstGeom prst="rect">
             <a:avLst/>
@@ -1724,7 +1724,7 @@
               <a:buNone/>
             </a:pPr>
             <a:r>
-              <a:rPr lang="en-US" sz="2000" dirty="0">
+              <a:rPr lang="en-US" sz="2000" b="1" dirty="0">
                 <a:solidFill>
                   <a:srgbClr val="161616"/>
                 </a:solidFill>
@@ -1732,27 +1732,10 @@
                 <a:ea typeface="Yu Gothic" pitchFamily="34" charset="-122"/>
                 <a:cs typeface="Yu Gothic" pitchFamily="34" charset="-120"/>
               </a:rPr>
-              <a:t>文字の読みやすさ・</a:t>
+              <a:t>文字の読みやすさ・問い合わせ</a:t>
             </a:r>
             <a:endParaRPr lang="en-US" sz="2000" dirty="0"/>
           </a:p>
-          <a:p>
-            <a:pPr algn="l" indent="0" marL="0">
-              <a:buNone/>
-            </a:pPr>
-            <a:r>
-              <a:rPr lang="en-US" sz="2000" dirty="0">
-                <a:solidFill>
-                  <a:srgbClr val="161616"/>
-                </a:solidFill>
-                <a:latin typeface="Yu Gothic" pitchFamily="34" charset="0"/>
-                <a:ea typeface="Yu Gothic" pitchFamily="34" charset="-122"/>
-                <a:cs typeface="Yu Gothic" pitchFamily="34" charset="-120"/>
-              </a:rPr>
-              <a:t>問い合わせ</a:t>
-            </a:r>
-            <a:endParaRPr lang="en-US" sz="2000" dirty="0"/>
-          </a:p>
         </p:txBody>
       </p:sp>
       <p:sp>
@@ -1763,7 +1746,7 @@
         </p:nvSpPr>
         <p:spPr>
           <a:xfrm>
-            <a:off x="364584" y="4977698"/>
+            <a:off x="364584" y="4984986"/>
             <a:ext cx="11302110" cy="357112"/>
           </a:xfrm>
           <a:prstGeom prst="rect">
@@ -1864,7 +1847,7 @@
         </p:nvSpPr>
         <p:spPr>
           <a:xfrm>
-            <a:off x="371876" y="6041745"/>
+            <a:off x="371876" y="6034457"/>
             <a:ext cx="9114605" cy="546599"/>
           </a:xfrm>
           <a:prstGeom prst="rect">
@@ -1903,8 +1886,8 @@
         </p:nvSpPr>
         <p:spPr>
           <a:xfrm>
-            <a:off x="9479189" y="6376993"/>
-            <a:ext cx="2406256" cy="211352"/>
+            <a:off x="291667" y="6559192"/>
+            <a:ext cx="11608361" cy="189488"/>
           </a:xfrm>
           <a:prstGeom prst="rect">
             <a:avLst/>
@@ -1920,9 +1903,9 @@
               <a:buNone/>
             </a:pPr>
             <a:r>
-              <a:rPr lang="en-US" sz="900" dirty="0">
+              <a:rPr lang="en-US" sz="1100" dirty="0">
                 <a:solidFill>
-                  <a:srgbClr val="161616"/>
+                  <a:srgbClr val="514B44"/>
                 </a:solidFill>
                 <a:latin typeface="Yu Gothic" pitchFamily="34" charset="0"/>
                 <a:ea typeface="Yu Gothic" pitchFamily="34" charset="-122"/>
@@ -1930,7 +1913,7 @@
               </a:rPr>
               <a:t>架空の企画例。試行は提案であり未実施。</a:t>
             </a:r>
-            <a:endParaRPr lang="en-US" sz="900" dirty="0"/>
+            <a:endParaRPr lang="en-US" sz="1100" dirty="0"/>
           </a:p>
         </p:txBody>
       </p:sp>
